--- a/maven_training/pdf/MSS_Project_Overview.pptx
+++ b/maven_training/pdf/MSS_Project_Overview.pptx
@@ -4332,7 +4332,7 @@
                 </a:solidFill>
                 <a:latin typeface="Arial"/>
               </a:rPr>
-              <a:t>TM-40 SERIES  —  6 Specialist Tracks</a:t>
+              <a:t>TM-40 SERIES  —  12 Tracks  (WFF + Specialist)</a:t>
             </a:r>
           </a:p>
         </p:txBody>
@@ -4367,8 +4367,8 @@
                 </a:solidFill>
                 <a:latin typeface="Arial"/>
               </a:rPr>
-              <a:t>40A ORSA  ·  40B AI Engineer  ·  40C ML Engineer
-40D Program Manager  ·  40E Knowledge Manager  ·  40F Software Engineer
+              <a:t>WFF (A–F): Intel · Fires · M&amp;M · Sust · Prot · Msn Cmd
+Specialist (G–L): ORSA · AI Eng · MLE · PM · KM · SWE
 Prereq: TM-30. Role-assigned. Each track: Technical Manual + Concepts Guide + Syllabus.
 Produces the analysts, engineers, and PMs who build the platform's most capable products.</a:t>
             </a:r>

--- a/maven_training/pdf/MSS_Project_Overview.pptx
+++ b/maven_training/pdf/MSS_Project_Overview.pptx
@@ -4174,7 +4174,7 @@
                 </a:solidFill>
                 <a:latin typeface="Arial"/>
               </a:rPr>
-              <a:t>Data-adjacent specialists (17/25-series, S6, G2, G9)</a:t>
+              <a:t>Data-adjacent specialists (17/25-series, S6, G2)</a:t>
             </a:r>
           </a:p>
         </p:txBody>
@@ -4332,7 +4332,7 @@
                 </a:solidFill>
                 <a:latin typeface="Arial"/>
               </a:rPr>
-              <a:t>TM-40 SERIES  —  12 Tracks  (WFF + Specialist)</a:t>
+              <a:t>TM-40 SERIES  —  12 Tracks (WFF A–F + Specialist G–L)</a:t>
             </a:r>
           </a:p>
         </p:txBody>
@@ -4367,8 +4367,8 @@
                 </a:solidFill>
                 <a:latin typeface="Arial"/>
               </a:rPr>
-              <a:t>WFF (A–F): Intel · Fires · M&amp;M · Sust · Prot · Msn Cmd
-Specialist (G–L): ORSA · AI Eng · MLE · PM · KM · SWE
+              <a:t>WFF: 40A Intel  ·  40B Fires  ·  40C M&amp;M  ·  40D Sust  ·  40E Prot  ·  40F MC
+Specialist: 40G ORSA  ·  40H AI Eng  ·  40I MLE  ·  40J PM  ·  40K KM  ·  40L SWE
 Prereq: TM-30. Role-assigned. Each track: Technical Manual + Concepts Guide + Syllabus.
 Produces the analysts, engineers, and PMs who build the platform's most capable products.</a:t>
             </a:r>
